--- a/outputs/INPC.pptx
+++ b/outputs/INPC.pptx
@@ -17,8 +17,10 @@
     <p:sldId id="263" r:id="rId11"/>
     <p:sldId id="264" r:id="rId12"/>
     <p:sldId id="265" r:id="rId13"/>
-    <p:sldId id="266" r:id="rId14"/>
-    <p:sldId id="267" r:id="rId15"/>
+    <p:sldId id="270" r:id="rId14"/>
+    <p:sldId id="271" r:id="rId15"/>
+    <p:sldId id="266" r:id="rId16"/>
+    <p:sldId id="267" r:id="rId17"/>
   </p:sldIdLst>
   <p:sldSz cx="12192000" cy="6858000"/>
   <p:notesSz cx="6858000" cy="9144000"/>
@@ -3713,7 +3715,7 @@
         </p:spPr>
         <p:txBody>
           <a:bodyPr vert="horz" lIns="91440" tIns="45720" rIns="91440" bIns="45720" rtlCol="0">
-            <a:normAutofit lnSpcReduction="10000"/>
+            <a:normAutofit/>
           </a:bodyPr>
           <a:lstStyle>
             <a:lvl1pPr marL="342900" indent="-342900" algn="l" defTabSz="457200" rtl="0" eaLnBrk="1" latinLnBrk="0" hangingPunct="1">
@@ -3951,31 +3953,7 @@
                 </a:solidFill>
                 <a:latin typeface="Montserrat" panose="00000500000000000000" pitchFamily="50" charset="0"/>
               </a:rPr>
-              <a:t>Visualmente lo podemos ver al graficar las ciudades como puntos de una coordenada (</a:t>
-            </a:r>
-            <a:r>
-              <a:rPr lang="es-ES" dirty="0" err="1">
-                <a:solidFill>
-                  <a:schemeClr val="tx1">
-                    <a:lumMod val="85000"/>
-                    <a:lumOff val="15000"/>
-                  </a:schemeClr>
-                </a:solidFill>
-                <a:latin typeface="Montserrat" panose="00000500000000000000" pitchFamily="50" charset="0"/>
-              </a:rPr>
-              <a:t>Indice</a:t>
-            </a:r>
-            <a:r>
-              <a:rPr lang="es-ES" dirty="0">
-                <a:solidFill>
-                  <a:schemeClr val="tx1">
-                    <a:lumMod val="85000"/>
-                    <a:lumOff val="15000"/>
-                  </a:schemeClr>
-                </a:solidFill>
-                <a:latin typeface="Montserrat" panose="00000500000000000000" pitchFamily="50" charset="0"/>
-              </a:rPr>
-              <a:t>), colocar la recta que corresponden al promedio del índice (línea roja) y ver aquellas que caigan.</a:t>
+              <a:t>Se puede visualizar al graficar las ciudades por el valor de su índice, colocar la recta que corresponden al promedio del índice (línea roja) y ver aquellas que caigan por debajo de ella.</a:t>
             </a:r>
           </a:p>
           <a:p>
@@ -4315,7 +4293,7 @@
                   <a:srgbClr val="545454"/>
                 </a:solidFill>
               </a:rPr>
-              <a:t>Gráfica de los datos para el genérico 001 Arroz. </a:t>
+              <a:t>Gráfica de los datos para el genérico “001 Arroz”. </a:t>
             </a:r>
           </a:p>
           <a:p>
@@ -4419,7 +4397,19 @@
               <a:rPr lang="es-MX" dirty="0">
                 <a:latin typeface="Montserrat" panose="00000500000000000000" pitchFamily="50" charset="0"/>
               </a:rPr>
-              <a:t>Si bien ambas propuestas son válidas, al calcular la ubicuidad (cuántas ciudades cuentan con un precio competitivo para cada genérico) existe una diferencia clara; la segunda propuesta siempre toma más ciudades para cada genérico.</a:t>
+              <a:t>Si bien ambas propuestas son válidas, al calcular la ubicuidad (cuántas ciudades cuentan con un precio competitivo para cada genérico) existe una diferencia clara; </a:t>
+            </a:r>
+            <a:r>
+              <a:rPr lang="es-MX" b="1" dirty="0">
+                <a:latin typeface="Montserrat" panose="00000500000000000000" pitchFamily="50" charset="0"/>
+              </a:rPr>
+              <a:t>la segunda opción siempre toma más ciudades</a:t>
+            </a:r>
+            <a:r>
+              <a:rPr lang="es-MX" dirty="0">
+                <a:latin typeface="Montserrat" panose="00000500000000000000" pitchFamily="50" charset="0"/>
+              </a:rPr>
+              <a:t> para cada genérico.</a:t>
             </a:r>
           </a:p>
           <a:p>
@@ -4832,13 +4822,13 @@
           </a:lstStyle>
           <a:p>
             <a:r>
-              <a:rPr lang="es-MX" b="1" dirty="0">
+              <a:rPr lang="es-MX" sz="4000" b="1" dirty="0">
                 <a:solidFill>
                   <a:schemeClr val="bg1"/>
                 </a:solidFill>
                 <a:latin typeface="Montserrat"/>
               </a:rPr>
-              <a:t>Comparación de resultados</a:t>
+              <a:t>Comparación de resultados (Ubicuidad)</a:t>
             </a:r>
           </a:p>
         </p:txBody>
@@ -5190,7 +5180,7 @@
         </p:spPr>
         <p:txBody>
           <a:bodyPr>
-            <a:normAutofit fontScale="92500"/>
+            <a:normAutofit fontScale="92500" lnSpcReduction="20000"/>
           </a:bodyPr>
           <a:lstStyle/>
           <a:p>
@@ -5199,7 +5189,15 @@
             </a:pPr>
             <a:r>
               <a:rPr lang="es-MX" sz="2600" dirty="0"/>
-              <a:t>Tenemos un caso del genérico 235 Paquetes de internet, telefonía y televisión de paga donde la opción 1 excluye a todas las ciudades mientras que la opción 2 toma 20.</a:t>
+              <a:t>Tenemos un caso del genérico </a:t>
+            </a:r>
+            <a:r>
+              <a:rPr lang="es-MX" sz="2600" i="1" dirty="0"/>
+              <a:t>“235 Paquetes de internet, telefonía y televisión de paga” </a:t>
+            </a:r>
+            <a:r>
+              <a:rPr lang="es-MX" sz="2600" dirty="0"/>
+              <a:t>donde la opción 1 excluye a todas las ciudades mientras que la opción 2 toma 20.</a:t>
             </a:r>
           </a:p>
           <a:p>
@@ -5564,94 +5562,6 @@
           </a:prstGeom>
         </p:spPr>
       </p:pic>
-      <p:sp>
-        <p:nvSpPr>
-          <p:cNvPr id="13" name="Title 1">
-            <a:extLst>
-              <a:ext uri="{FF2B5EF4-FFF2-40B4-BE49-F238E27FC236}">
-                <a16:creationId xmlns:a16="http://schemas.microsoft.com/office/drawing/2014/main" id="{5C9BF531-EC1D-4562-9F60-31A11F4A4FBB}"/>
-              </a:ext>
-            </a:extLst>
-          </p:cNvPr>
-          <p:cNvSpPr txBox="1">
-            <a:spLocks/>
-          </p:cNvSpPr>
-          <p:nvPr/>
-        </p:nvSpPr>
-        <p:spPr>
-          <a:xfrm>
-            <a:off x="602876" y="-133709"/>
-            <a:ext cx="10986247" cy="1450757"/>
-          </a:xfrm>
-          <a:prstGeom prst="rect">
-            <a:avLst/>
-          </a:prstGeom>
-        </p:spPr>
-        <p:txBody>
-          <a:bodyPr vert="horz" lIns="91440" tIns="45720" rIns="91440" bIns="45720" rtlCol="0" anchor="ctr">
-            <a:normAutofit/>
-          </a:bodyPr>
-          <a:lstStyle>
-            <a:lvl1pPr algn="l" defTabSz="914400" rtl="0" eaLnBrk="1" latinLnBrk="0" hangingPunct="1">
-              <a:lnSpc>
-                <a:spcPct val="90000"/>
-              </a:lnSpc>
-              <a:spcBef>
-                <a:spcPct val="0"/>
-              </a:spcBef>
-              <a:buNone/>
-              <a:defRPr sz="4400" kern="1200">
-                <a:solidFill>
-                  <a:schemeClr val="tx1"/>
-                </a:solidFill>
-                <a:latin typeface="+mj-lt"/>
-                <a:ea typeface="+mj-ea"/>
-                <a:cs typeface="+mj-cs"/>
-              </a:defRPr>
-            </a:lvl1pPr>
-          </a:lstStyle>
-          <a:p>
-            <a:r>
-              <a:rPr lang="es-MX" b="1" dirty="0">
-                <a:solidFill>
-                  <a:schemeClr val="bg1"/>
-                </a:solidFill>
-                <a:latin typeface="Montserrat"/>
-              </a:rPr>
-              <a:t>Comparación de resultados</a:t>
-            </a:r>
-          </a:p>
-        </p:txBody>
-      </p:sp>
-      <p:pic>
-        <p:nvPicPr>
-          <p:cNvPr id="14" name="Picture 13">
-            <a:extLst>
-              <a:ext uri="{FF2B5EF4-FFF2-40B4-BE49-F238E27FC236}">
-                <a16:creationId xmlns:a16="http://schemas.microsoft.com/office/drawing/2014/main" id="{71C04DFC-8536-4842-8D11-3A875BEC1779}"/>
-              </a:ext>
-            </a:extLst>
-          </p:cNvPr>
-          <p:cNvPicPr>
-            <a:picLocks noChangeAspect="1"/>
-          </p:cNvPicPr>
-          <p:nvPr/>
-        </p:nvPicPr>
-        <p:blipFill rotWithShape="1">
-          <a:blip r:embed="rId3"/>
-          <a:srcRect b="51135"/>
-          <a:stretch/>
-        </p:blipFill>
-        <p:spPr>
-          <a:xfrm>
-            <a:off x="678750" y="2096490"/>
-            <a:ext cx="4315427" cy="437573"/>
-          </a:xfrm>
-          <a:prstGeom prst="rect">
-            <a:avLst/>
-          </a:prstGeom>
-        </p:spPr>
-      </p:pic>
       <p:pic>
         <p:nvPicPr>
           <p:cNvPr id="15" name="Picture 14">
@@ -5667,7 +5577,7 @@
           <p:nvPr/>
         </p:nvPicPr>
         <p:blipFill>
-          <a:blip r:embed="rId4"/>
+          <a:blip r:embed="rId3"/>
           <a:stretch>
             <a:fillRect/>
           </a:stretch>
@@ -5940,7 +5850,7 @@
                   <a:srgbClr val="545454"/>
                 </a:solidFill>
               </a:rPr>
-              <a:t>Gráficas para 235 </a:t>
+              <a:t>Gráficas para “235 </a:t>
             </a:r>
             <a:r>
               <a:rPr lang="es-ES" sz="1700" i="1" dirty="0">
@@ -5948,7 +5858,7 @@
                   <a:srgbClr val="545454"/>
                 </a:solidFill>
               </a:rPr>
-              <a:t>Paquetes de internet, telefonía y televisión de paga.</a:t>
+              <a:t>Paquetes de internet, telefonía y televisión de paga”.</a:t>
             </a:r>
             <a:r>
               <a:rPr lang="es-MX" sz="1700" i="1" dirty="0">
@@ -5978,10 +5888,10 @@
       </p:sp>
       <p:pic>
         <p:nvPicPr>
-          <p:cNvPr id="17" name="Picture 16">
+          <p:cNvPr id="19" name="Picture 18">
             <a:extLst>
               <a:ext uri="{FF2B5EF4-FFF2-40B4-BE49-F238E27FC236}">
-                <a16:creationId xmlns:a16="http://schemas.microsoft.com/office/drawing/2014/main" id="{EA1C15EA-EFB7-4A03-A04D-0A41A833E572}"/>
+                <a16:creationId xmlns:a16="http://schemas.microsoft.com/office/drawing/2014/main" id="{1538750A-87A3-45C0-91CA-82B9D2E8A9C2}"/>
               </a:ext>
             </a:extLst>
           </p:cNvPr>
@@ -5991,20 +5901,108 @@
           <p:nvPr/>
         </p:nvPicPr>
         <p:blipFill rotWithShape="1">
-          <a:blip r:embed="rId3"/>
-          <a:srcRect t="74857"/>
+          <a:blip r:embed="rId4"/>
+          <a:srcRect b="65265"/>
           <a:stretch/>
         </p:blipFill>
         <p:spPr>
           <a:xfrm>
-            <a:off x="678750" y="2510504"/>
-            <a:ext cx="4315427" cy="225153"/>
+            <a:off x="647700" y="2105985"/>
+            <a:ext cx="3781953" cy="244865"/>
           </a:xfrm>
           <a:prstGeom prst="rect">
             <a:avLst/>
           </a:prstGeom>
         </p:spPr>
       </p:pic>
+      <p:pic>
+        <p:nvPicPr>
+          <p:cNvPr id="20" name="Picture 19">
+            <a:extLst>
+              <a:ext uri="{FF2B5EF4-FFF2-40B4-BE49-F238E27FC236}">
+                <a16:creationId xmlns:a16="http://schemas.microsoft.com/office/drawing/2014/main" id="{8EE2B822-50E7-4784-8936-339E9BE0D8F5}"/>
+              </a:ext>
+            </a:extLst>
+          </p:cNvPr>
+          <p:cNvPicPr>
+            <a:picLocks noChangeAspect="1"/>
+          </p:cNvPicPr>
+          <p:nvPr/>
+        </p:nvPicPr>
+        <p:blipFill rotWithShape="1">
+          <a:blip r:embed="rId4"/>
+          <a:srcRect t="65265"/>
+          <a:stretch/>
+        </p:blipFill>
+        <p:spPr>
+          <a:xfrm>
+            <a:off x="647699" y="2350850"/>
+            <a:ext cx="3781953" cy="244865"/>
+          </a:xfrm>
+          <a:prstGeom prst="rect">
+            <a:avLst/>
+          </a:prstGeom>
+        </p:spPr>
+      </p:pic>
+      <p:sp>
+        <p:nvSpPr>
+          <p:cNvPr id="21" name="Title 1">
+            <a:extLst>
+              <a:ext uri="{FF2B5EF4-FFF2-40B4-BE49-F238E27FC236}">
+                <a16:creationId xmlns:a16="http://schemas.microsoft.com/office/drawing/2014/main" id="{8A01CD78-1F69-4F41-8016-5AA1A4A0B7FB}"/>
+              </a:ext>
+            </a:extLst>
+          </p:cNvPr>
+          <p:cNvSpPr txBox="1">
+            <a:spLocks/>
+          </p:cNvSpPr>
+          <p:nvPr/>
+        </p:nvSpPr>
+        <p:spPr>
+          <a:xfrm>
+            <a:off x="602876" y="-133709"/>
+            <a:ext cx="10986247" cy="1450757"/>
+          </a:xfrm>
+          <a:prstGeom prst="rect">
+            <a:avLst/>
+          </a:prstGeom>
+        </p:spPr>
+        <p:txBody>
+          <a:bodyPr vert="horz" lIns="91440" tIns="45720" rIns="91440" bIns="45720" rtlCol="0" anchor="ctr">
+            <a:normAutofit/>
+          </a:bodyPr>
+          <a:lstStyle>
+            <a:lvl1pPr algn="l" defTabSz="914400" rtl="0" eaLnBrk="1" latinLnBrk="0" hangingPunct="1">
+              <a:lnSpc>
+                <a:spcPct val="90000"/>
+              </a:lnSpc>
+              <a:spcBef>
+                <a:spcPct val="0"/>
+              </a:spcBef>
+              <a:buNone/>
+              <a:defRPr sz="4400" kern="1200">
+                <a:solidFill>
+                  <a:schemeClr val="tx1"/>
+                </a:solidFill>
+                <a:latin typeface="+mj-lt"/>
+                <a:ea typeface="+mj-ea"/>
+                <a:cs typeface="+mj-cs"/>
+              </a:defRPr>
+            </a:lvl1pPr>
+          </a:lstStyle>
+          <a:p>
+            <a:r>
+              <a:rPr lang="es-MX" sz="4000" b="1" dirty="0">
+                <a:solidFill>
+                  <a:schemeClr val="bg1"/>
+                </a:solidFill>
+                <a:latin typeface="Montserrat"/>
+              </a:rPr>
+              <a:t>Comparación de resultados (Ubicuidad)</a:t>
+            </a:r>
+          </a:p>
+        </p:txBody>
+      </p:sp>
     </p:spTree>
     <p:extLst>
       <p:ext uri="{BB962C8B-B14F-4D97-AF65-F5344CB8AC3E}">
@@ -6037,10 +6035,10 @@
       </p:grpSpPr>
       <p:sp>
         <p:nvSpPr>
-          <p:cNvPr id="2" name="Title 1">
+          <p:cNvPr id="3" name="Content Placeholder 2">
             <a:extLst>
               <a:ext uri="{FF2B5EF4-FFF2-40B4-BE49-F238E27FC236}">
-                <a16:creationId xmlns:a16="http://schemas.microsoft.com/office/drawing/2014/main" id="{CDA8EDA7-9C38-4347-A17C-3C475136A578}"/>
+                <a16:creationId xmlns:a16="http://schemas.microsoft.com/office/drawing/2014/main" id="{2DF9D151-82C0-43EE-B707-76C5539F5847}"/>
               </a:ext>
             </a:extLst>
           </p:cNvPr>
@@ -6048,26 +6046,1281 @@
             <a:spLocks noGrp="1"/>
           </p:cNvSpPr>
           <p:nvPr>
-            <p:ph type="title"/>
+            <p:ph idx="1"/>
           </p:nvPr>
         </p:nvSpPr>
         <p:spPr>
           <a:xfrm>
-            <a:off x="683443" y="2282590"/>
-            <a:ext cx="8911687" cy="1280890"/>
+            <a:off x="5002306" y="1450757"/>
+            <a:ext cx="6510944" cy="4492843"/>
           </a:xfrm>
         </p:spPr>
         <p:txBody>
-          <a:bodyPr/>
+          <a:bodyPr>
+            <a:normAutofit/>
+          </a:bodyPr>
           <a:lstStyle/>
           <a:p>
+            <a:pPr marL="0" indent="0">
+              <a:lnSpc>
+                <a:spcPct val="150000"/>
+              </a:lnSpc>
+              <a:buNone/>
+            </a:pPr>
+            <a:r>
+              <a:rPr lang="es-MX" dirty="0">
+                <a:latin typeface="Montserrat" panose="00000500000000000000" pitchFamily="50" charset="0"/>
+              </a:rPr>
+              <a:t>De la misma forma, al calcular la diversidad (cuántos genéricos cuentan con un precio competitivo para cada ciudad) </a:t>
+            </a:r>
+            <a:r>
+              <a:rPr lang="es-MX" b="1" dirty="0">
+                <a:latin typeface="Montserrat" panose="00000500000000000000" pitchFamily="50" charset="0"/>
+              </a:rPr>
+              <a:t>la segunda opción siempre toma más genéricos</a:t>
+            </a:r>
+            <a:r>
+              <a:rPr lang="es-MX" dirty="0">
+                <a:latin typeface="Montserrat" panose="00000500000000000000" pitchFamily="50" charset="0"/>
+              </a:rPr>
+              <a:t> para cada ciudad.</a:t>
+            </a:r>
+          </a:p>
+          <a:p>
+            <a:pPr marL="0" indent="0">
+              <a:buNone/>
+            </a:pPr>
+            <a:endParaRPr lang="es-MX" sz="2000" dirty="0"/>
+          </a:p>
+          <a:p>
+            <a:pPr marL="0" indent="0">
+              <a:buNone/>
+            </a:pPr>
+            <a:endParaRPr lang="es-MX" sz="2000" dirty="0"/>
+          </a:p>
+        </p:txBody>
+      </p:sp>
+      <p:sp>
+        <p:nvSpPr>
+          <p:cNvPr id="10" name="Rectangle 9">
+            <a:extLst>
+              <a:ext uri="{FF2B5EF4-FFF2-40B4-BE49-F238E27FC236}">
+                <a16:creationId xmlns:a16="http://schemas.microsoft.com/office/drawing/2014/main" id="{D72E4D08-3DDB-4143-8CA1-9EA8A64D5914}"/>
+              </a:ext>
+            </a:extLst>
+          </p:cNvPr>
+          <p:cNvSpPr/>
+          <p:nvPr/>
+        </p:nvSpPr>
+        <p:spPr>
+          <a:xfrm>
+            <a:off x="0" y="0"/>
+            <a:ext cx="12192000" cy="1183341"/>
+          </a:xfrm>
+          <a:prstGeom prst="rect">
+            <a:avLst/>
+          </a:prstGeom>
+          <a:solidFill>
+            <a:srgbClr val="92081C"/>
+          </a:solidFill>
+          <a:ln>
+            <a:solidFill>
+              <a:srgbClr val="92081C"/>
+            </a:solidFill>
+          </a:ln>
+        </p:spPr>
+        <p:style>
+          <a:lnRef idx="2">
+            <a:schemeClr val="accent1">
+              <a:shade val="50000"/>
+            </a:schemeClr>
+          </a:lnRef>
+          <a:fillRef idx="1">
+            <a:schemeClr val="accent1"/>
+          </a:fillRef>
+          <a:effectRef idx="0">
+            <a:schemeClr val="accent1"/>
+          </a:effectRef>
+          <a:fontRef idx="minor">
+            <a:schemeClr val="lt1"/>
+          </a:fontRef>
+        </p:style>
+        <p:txBody>
+          <a:bodyPr rtlCol="0" anchor="ctr"/>
+          <a:lstStyle/>
+          <a:p>
+            <a:pPr algn="ctr"/>
+            <a:endParaRPr lang="es-MX"/>
+          </a:p>
+        </p:txBody>
+      </p:sp>
+      <p:sp>
+        <p:nvSpPr>
+          <p:cNvPr id="11" name="Title 1">
+            <a:extLst>
+              <a:ext uri="{FF2B5EF4-FFF2-40B4-BE49-F238E27FC236}">
+                <a16:creationId xmlns:a16="http://schemas.microsoft.com/office/drawing/2014/main" id="{3AE30553-E71D-4DE8-B240-0C5D3AC87549}"/>
+              </a:ext>
+            </a:extLst>
+          </p:cNvPr>
+          <p:cNvSpPr txBox="1">
+            <a:spLocks/>
+          </p:cNvSpPr>
+          <p:nvPr/>
+        </p:nvSpPr>
+        <p:spPr>
+          <a:xfrm>
+            <a:off x="602876" y="-133709"/>
+            <a:ext cx="10986247" cy="1450757"/>
+          </a:xfrm>
+          <a:prstGeom prst="rect">
+            <a:avLst/>
+          </a:prstGeom>
+        </p:spPr>
+        <p:txBody>
+          <a:bodyPr vert="horz" lIns="91440" tIns="45720" rIns="91440" bIns="45720" rtlCol="0" anchor="ctr">
+            <a:normAutofit/>
+          </a:bodyPr>
+          <a:lstStyle>
+            <a:lvl1pPr algn="l" defTabSz="914400" rtl="0" eaLnBrk="1" latinLnBrk="0" hangingPunct="1">
+              <a:lnSpc>
+                <a:spcPct val="90000"/>
+              </a:lnSpc>
+              <a:spcBef>
+                <a:spcPct val="0"/>
+              </a:spcBef>
+              <a:buNone/>
+              <a:defRPr sz="4400" kern="1200">
+                <a:solidFill>
+                  <a:schemeClr val="tx1"/>
+                </a:solidFill>
+                <a:latin typeface="+mj-lt"/>
+                <a:ea typeface="+mj-ea"/>
+                <a:cs typeface="+mj-cs"/>
+              </a:defRPr>
+            </a:lvl1pPr>
+          </a:lstStyle>
+          <a:p>
+            <a:r>
+              <a:rPr lang="es-MX" sz="4000" b="1" dirty="0">
+                <a:solidFill>
+                  <a:schemeClr val="bg1"/>
+                </a:solidFill>
+                <a:latin typeface="Montserrat"/>
+              </a:rPr>
+              <a:t>Comparación de resultados (Diversidad)</a:t>
+            </a:r>
+          </a:p>
+        </p:txBody>
+      </p:sp>
+      <p:sp>
+        <p:nvSpPr>
+          <p:cNvPr id="12" name="Content Placeholder 2">
+            <a:extLst>
+              <a:ext uri="{FF2B5EF4-FFF2-40B4-BE49-F238E27FC236}">
+                <a16:creationId xmlns:a16="http://schemas.microsoft.com/office/drawing/2014/main" id="{A4DAA697-C901-46AD-939B-BA40408723E6}"/>
+              </a:ext>
+            </a:extLst>
+          </p:cNvPr>
+          <p:cNvSpPr txBox="1">
+            <a:spLocks/>
+          </p:cNvSpPr>
+          <p:nvPr/>
+        </p:nvSpPr>
+        <p:spPr>
+          <a:xfrm>
+            <a:off x="4502294" y="5661180"/>
+            <a:ext cx="4431362" cy="933871"/>
+          </a:xfrm>
+          <a:prstGeom prst="rect">
+            <a:avLst/>
+          </a:prstGeom>
+        </p:spPr>
+        <p:txBody>
+          <a:bodyPr vert="horz" lIns="91440" tIns="45720" rIns="91440" bIns="45720" rtlCol="0">
+            <a:normAutofit fontScale="92500" lnSpcReduction="20000"/>
+          </a:bodyPr>
+          <a:lstStyle>
+            <a:lvl1pPr marL="342900" indent="-342900" algn="l" defTabSz="457200" rtl="0" eaLnBrk="1" latinLnBrk="0" hangingPunct="1">
+              <a:spcBef>
+                <a:spcPts val="1000"/>
+              </a:spcBef>
+              <a:spcAft>
+                <a:spcPts val="0"/>
+              </a:spcAft>
+              <a:buClr>
+                <a:schemeClr val="accent1"/>
+              </a:buClr>
+              <a:buFont typeface="Wingdings 3" charset="2"/>
+              <a:buChar char=""/>
+              <a:defRPr sz="1800" kern="1200">
+                <a:solidFill>
+                  <a:schemeClr val="tx1">
+                    <a:lumMod val="75000"/>
+                    <a:lumOff val="25000"/>
+                  </a:schemeClr>
+                </a:solidFill>
+                <a:latin typeface="+mn-lt"/>
+                <a:ea typeface="+mn-ea"/>
+                <a:cs typeface="+mn-cs"/>
+              </a:defRPr>
+            </a:lvl1pPr>
+            <a:lvl2pPr marL="742950" indent="-285750" algn="l" defTabSz="457200" rtl="0" eaLnBrk="1" latinLnBrk="0" hangingPunct="1">
+              <a:spcBef>
+                <a:spcPts val="1000"/>
+              </a:spcBef>
+              <a:spcAft>
+                <a:spcPts val="0"/>
+              </a:spcAft>
+              <a:buClr>
+                <a:schemeClr val="accent1"/>
+              </a:buClr>
+              <a:buFont typeface="Wingdings 3" charset="2"/>
+              <a:buChar char=""/>
+              <a:defRPr sz="1600" kern="1200">
+                <a:solidFill>
+                  <a:schemeClr val="tx1">
+                    <a:lumMod val="75000"/>
+                    <a:lumOff val="25000"/>
+                  </a:schemeClr>
+                </a:solidFill>
+                <a:latin typeface="+mn-lt"/>
+                <a:ea typeface="+mn-ea"/>
+                <a:cs typeface="+mn-cs"/>
+              </a:defRPr>
+            </a:lvl2pPr>
+            <a:lvl3pPr marL="1143000" indent="-228600" algn="l" defTabSz="457200" rtl="0" eaLnBrk="1" latinLnBrk="0" hangingPunct="1">
+              <a:spcBef>
+                <a:spcPts val="1000"/>
+              </a:spcBef>
+              <a:spcAft>
+                <a:spcPts val="0"/>
+              </a:spcAft>
+              <a:buClr>
+                <a:schemeClr val="accent1"/>
+              </a:buClr>
+              <a:buFont typeface="Wingdings 3" charset="2"/>
+              <a:buChar char=""/>
+              <a:defRPr sz="1400" kern="1200">
+                <a:solidFill>
+                  <a:schemeClr val="tx1">
+                    <a:lumMod val="75000"/>
+                    <a:lumOff val="25000"/>
+                  </a:schemeClr>
+                </a:solidFill>
+                <a:latin typeface="+mn-lt"/>
+                <a:ea typeface="+mn-ea"/>
+                <a:cs typeface="+mn-cs"/>
+              </a:defRPr>
+            </a:lvl3pPr>
+            <a:lvl4pPr marL="1600200" indent="-228600" algn="l" defTabSz="457200" rtl="0" eaLnBrk="1" latinLnBrk="0" hangingPunct="1">
+              <a:spcBef>
+                <a:spcPts val="1000"/>
+              </a:spcBef>
+              <a:spcAft>
+                <a:spcPts val="0"/>
+              </a:spcAft>
+              <a:buClr>
+                <a:schemeClr val="accent1"/>
+              </a:buClr>
+              <a:buFont typeface="Wingdings 3" charset="2"/>
+              <a:buChar char=""/>
+              <a:defRPr sz="1200" kern="1200">
+                <a:solidFill>
+                  <a:schemeClr val="tx1">
+                    <a:lumMod val="75000"/>
+                    <a:lumOff val="25000"/>
+                  </a:schemeClr>
+                </a:solidFill>
+                <a:latin typeface="+mn-lt"/>
+                <a:ea typeface="+mn-ea"/>
+                <a:cs typeface="+mn-cs"/>
+              </a:defRPr>
+            </a:lvl4pPr>
+            <a:lvl5pPr marL="2057400" indent="-228600" algn="l" defTabSz="457200" rtl="0" eaLnBrk="1" latinLnBrk="0" hangingPunct="1">
+              <a:spcBef>
+                <a:spcPts val="1000"/>
+              </a:spcBef>
+              <a:spcAft>
+                <a:spcPts val="0"/>
+              </a:spcAft>
+              <a:buClr>
+                <a:schemeClr val="accent1"/>
+              </a:buClr>
+              <a:buFont typeface="Wingdings 3" charset="2"/>
+              <a:buChar char=""/>
+              <a:defRPr sz="1200" kern="1200">
+                <a:solidFill>
+                  <a:schemeClr val="tx1">
+                    <a:lumMod val="75000"/>
+                    <a:lumOff val="25000"/>
+                  </a:schemeClr>
+                </a:solidFill>
+                <a:latin typeface="+mn-lt"/>
+                <a:ea typeface="+mn-ea"/>
+                <a:cs typeface="+mn-cs"/>
+              </a:defRPr>
+            </a:lvl5pPr>
+            <a:lvl6pPr marL="2514600" indent="-228600" algn="l" defTabSz="457200" rtl="0" eaLnBrk="1" latinLnBrk="0" hangingPunct="1">
+              <a:spcBef>
+                <a:spcPts val="1000"/>
+              </a:spcBef>
+              <a:spcAft>
+                <a:spcPts val="0"/>
+              </a:spcAft>
+              <a:buClr>
+                <a:schemeClr val="accent1"/>
+              </a:buClr>
+              <a:buFont typeface="Wingdings 3" charset="2"/>
+              <a:buChar char=""/>
+              <a:defRPr sz="1200" kern="1200">
+                <a:solidFill>
+                  <a:schemeClr val="tx1">
+                    <a:lumMod val="75000"/>
+                    <a:lumOff val="25000"/>
+                  </a:schemeClr>
+                </a:solidFill>
+                <a:latin typeface="+mn-lt"/>
+                <a:ea typeface="+mn-ea"/>
+                <a:cs typeface="+mn-cs"/>
+              </a:defRPr>
+            </a:lvl6pPr>
+            <a:lvl7pPr marL="2971800" indent="-228600" algn="l" defTabSz="457200" rtl="0" eaLnBrk="1" latinLnBrk="0" hangingPunct="1">
+              <a:spcBef>
+                <a:spcPts val="1000"/>
+              </a:spcBef>
+              <a:spcAft>
+                <a:spcPts val="0"/>
+              </a:spcAft>
+              <a:buClr>
+                <a:schemeClr val="accent1"/>
+              </a:buClr>
+              <a:buFont typeface="Wingdings 3" charset="2"/>
+              <a:buChar char=""/>
+              <a:defRPr sz="1200" kern="1200">
+                <a:solidFill>
+                  <a:schemeClr val="tx1">
+                    <a:lumMod val="75000"/>
+                    <a:lumOff val="25000"/>
+                  </a:schemeClr>
+                </a:solidFill>
+                <a:latin typeface="+mn-lt"/>
+                <a:ea typeface="+mn-ea"/>
+                <a:cs typeface="+mn-cs"/>
+              </a:defRPr>
+            </a:lvl7pPr>
+            <a:lvl8pPr marL="3429000" indent="-228600" algn="l" defTabSz="457200" rtl="0" eaLnBrk="1" latinLnBrk="0" hangingPunct="1">
+              <a:spcBef>
+                <a:spcPts val="1000"/>
+              </a:spcBef>
+              <a:spcAft>
+                <a:spcPts val="0"/>
+              </a:spcAft>
+              <a:buClr>
+                <a:schemeClr val="accent1"/>
+              </a:buClr>
+              <a:buFont typeface="Wingdings 3" charset="2"/>
+              <a:buChar char=""/>
+              <a:defRPr sz="1200" kern="1200">
+                <a:solidFill>
+                  <a:schemeClr val="tx1">
+                    <a:lumMod val="75000"/>
+                    <a:lumOff val="25000"/>
+                  </a:schemeClr>
+                </a:solidFill>
+                <a:latin typeface="+mn-lt"/>
+                <a:ea typeface="+mn-ea"/>
+                <a:cs typeface="+mn-cs"/>
+              </a:defRPr>
+            </a:lvl8pPr>
+            <a:lvl9pPr marL="3886200" indent="-228600" algn="l" defTabSz="457200" rtl="0" eaLnBrk="1" latinLnBrk="0" hangingPunct="1">
+              <a:spcBef>
+                <a:spcPts val="1000"/>
+              </a:spcBef>
+              <a:spcAft>
+                <a:spcPts val="0"/>
+              </a:spcAft>
+              <a:buClr>
+                <a:schemeClr val="accent1"/>
+              </a:buClr>
+              <a:buFont typeface="Wingdings 3" charset="2"/>
+              <a:buChar char=""/>
+              <a:defRPr sz="1200" kern="1200">
+                <a:solidFill>
+                  <a:schemeClr val="tx1">
+                    <a:lumMod val="75000"/>
+                    <a:lumOff val="25000"/>
+                  </a:schemeClr>
+                </a:solidFill>
+                <a:latin typeface="+mn-lt"/>
+                <a:ea typeface="+mn-ea"/>
+                <a:cs typeface="+mn-cs"/>
+              </a:defRPr>
+            </a:lvl9pPr>
+          </a:lstStyle>
+          <a:p>
+            <a:pPr marL="0" indent="0">
+              <a:spcBef>
+                <a:spcPts val="0"/>
+              </a:spcBef>
+              <a:buNone/>
+            </a:pPr>
+            <a:r>
+              <a:rPr lang="es-ES" i="1" dirty="0">
+                <a:solidFill>
+                  <a:srgbClr val="545454"/>
+                </a:solidFill>
+              </a:rPr>
+              <a:t>Cuadro comparativo de diversidad para algunas ciudades. </a:t>
+            </a:r>
+          </a:p>
+          <a:p>
+            <a:pPr marL="0" indent="0">
+              <a:spcBef>
+                <a:spcPts val="0"/>
+              </a:spcBef>
+              <a:buNone/>
+            </a:pPr>
+            <a:r>
+              <a:rPr lang="es-ES" i="1" dirty="0">
+                <a:solidFill>
+                  <a:srgbClr val="545454"/>
+                </a:solidFill>
+              </a:rPr>
+              <a:t>En la segunda columna vemos los resultados de la opción 1 y en la tercera los de la opción 2.</a:t>
+            </a:r>
+          </a:p>
+          <a:p>
+            <a:pPr marL="0" indent="0">
+              <a:buFont typeface="Wingdings 3" charset="2"/>
+              <a:buNone/>
+            </a:pPr>
+            <a:endParaRPr lang="es-MX" sz="2000" dirty="0"/>
+          </a:p>
+          <a:p>
+            <a:pPr marL="0" indent="0">
+              <a:buFont typeface="Wingdings 3" charset="2"/>
+              <a:buNone/>
+            </a:pPr>
+            <a:endParaRPr lang="es-MX" sz="2000" dirty="0"/>
+          </a:p>
+        </p:txBody>
+      </p:sp>
+      <p:pic>
+        <p:nvPicPr>
+          <p:cNvPr id="2" name="Picture 1">
+            <a:extLst>
+              <a:ext uri="{FF2B5EF4-FFF2-40B4-BE49-F238E27FC236}">
+                <a16:creationId xmlns:a16="http://schemas.microsoft.com/office/drawing/2014/main" id="{509E5EA5-3D8C-427A-8199-86946310DB2A}"/>
+              </a:ext>
+            </a:extLst>
+          </p:cNvPr>
+          <p:cNvPicPr>
+            <a:picLocks noChangeAspect="1"/>
+          </p:cNvPicPr>
+          <p:nvPr/>
+        </p:nvPicPr>
+        <p:blipFill>
+          <a:blip r:embed="rId2"/>
+          <a:stretch>
+            <a:fillRect/>
+          </a:stretch>
+        </p:blipFill>
+        <p:spPr>
+          <a:xfrm>
+            <a:off x="778392" y="1501564"/>
+            <a:ext cx="3768208" cy="4908272"/>
+          </a:xfrm>
+          <a:prstGeom prst="rect">
+            <a:avLst/>
+          </a:prstGeom>
+        </p:spPr>
+      </p:pic>
+    </p:spTree>
+    <p:extLst>
+      <p:ext uri="{BB962C8B-B14F-4D97-AF65-F5344CB8AC3E}">
+        <p14:creationId xmlns:p14="http://schemas.microsoft.com/office/powerpoint/2010/main" val="4204021031"/>
+      </p:ext>
+    </p:extLst>
+  </p:cSld>
+  <p:clrMapOvr>
+    <a:masterClrMapping/>
+  </p:clrMapOvr>
+</p:sld>
+</file>
+
+<file path=ppt/slides/slide14.xml><?xml version="1.0" encoding="utf-8"?>
+<p:sld xmlns:a="http://schemas.openxmlformats.org/drawingml/2006/main" xmlns:r="http://schemas.openxmlformats.org/officeDocument/2006/relationships" xmlns:p="http://schemas.openxmlformats.org/presentationml/2006/main">
+  <p:cSld>
+    <p:spTree>
+      <p:nvGrpSpPr>
+        <p:cNvPr id="1" name=""/>
+        <p:cNvGrpSpPr/>
+        <p:nvPr/>
+      </p:nvGrpSpPr>
+      <p:grpSpPr>
+        <a:xfrm>
+          <a:off x="0" y="0"/>
+          <a:ext cx="0" cy="0"/>
+          <a:chOff x="0" y="0"/>
+          <a:chExt cx="0" cy="0"/>
+        </a:xfrm>
+      </p:grpSpPr>
+      <p:sp>
+        <p:nvSpPr>
+          <p:cNvPr id="3" name="Content Placeholder 2">
+            <a:extLst>
+              <a:ext uri="{FF2B5EF4-FFF2-40B4-BE49-F238E27FC236}">
+                <a16:creationId xmlns:a16="http://schemas.microsoft.com/office/drawing/2014/main" id="{2DF9D151-82C0-43EE-B707-76C5539F5847}"/>
+              </a:ext>
+            </a:extLst>
+          </p:cNvPr>
+          <p:cNvSpPr>
+            <a:spLocks noGrp="1"/>
+          </p:cNvSpPr>
+          <p:nvPr>
+            <p:ph idx="1"/>
+          </p:nvPr>
+        </p:nvSpPr>
+        <p:spPr>
+          <a:xfrm>
+            <a:off x="647700" y="1317048"/>
+            <a:ext cx="10986246" cy="1951038"/>
+          </a:xfrm>
+        </p:spPr>
+        <p:txBody>
+          <a:bodyPr>
+            <a:normAutofit fontScale="77500" lnSpcReduction="20000"/>
+          </a:bodyPr>
+          <a:lstStyle/>
+          <a:p>
+            <a:pPr marL="0" indent="0">
+              <a:lnSpc>
+                <a:spcPct val="170000"/>
+              </a:lnSpc>
+              <a:buNone/>
+            </a:pPr>
+            <a:r>
+              <a:rPr lang="es-MX" sz="2600" dirty="0">
+                <a:latin typeface="Montserrat" panose="00000500000000000000" pitchFamily="50" charset="0"/>
+              </a:rPr>
+              <a:t>Para las tres ciudades de interés podemos ver su diversidad. Sin embargo su posición entre las ciudades con mas genéricos de precios competentes depende de la opción que elijamos, salvo Área Metropolitana de la Cd. de México, que en ambos casos es la primera.</a:t>
+            </a:r>
+          </a:p>
+          <a:p>
+            <a:pPr marL="0" indent="0">
+              <a:buNone/>
+            </a:pPr>
+            <a:endParaRPr lang="es-MX" sz="2000" dirty="0"/>
+          </a:p>
+          <a:p>
+            <a:pPr marL="0" indent="0">
+              <a:buNone/>
+            </a:pPr>
+            <a:endParaRPr lang="es-MX" sz="2000" dirty="0"/>
+          </a:p>
+        </p:txBody>
+      </p:sp>
+      <p:sp>
+        <p:nvSpPr>
+          <p:cNvPr id="11" name="Rectangle 10">
+            <a:extLst>
+              <a:ext uri="{FF2B5EF4-FFF2-40B4-BE49-F238E27FC236}">
+                <a16:creationId xmlns:a16="http://schemas.microsoft.com/office/drawing/2014/main" id="{A042237D-221D-4425-A393-3E4564EF74FE}"/>
+              </a:ext>
+            </a:extLst>
+          </p:cNvPr>
+          <p:cNvSpPr/>
+          <p:nvPr/>
+        </p:nvSpPr>
+        <p:spPr>
+          <a:xfrm>
+            <a:off x="0" y="0"/>
+            <a:ext cx="12192000" cy="1183341"/>
+          </a:xfrm>
+          <a:prstGeom prst="rect">
+            <a:avLst/>
+          </a:prstGeom>
+          <a:solidFill>
+            <a:srgbClr val="92081C"/>
+          </a:solidFill>
+          <a:ln>
+            <a:solidFill>
+              <a:srgbClr val="92081C"/>
+            </a:solidFill>
+          </a:ln>
+        </p:spPr>
+        <p:style>
+          <a:lnRef idx="2">
+            <a:schemeClr val="accent1">
+              <a:shade val="50000"/>
+            </a:schemeClr>
+          </a:lnRef>
+          <a:fillRef idx="1">
+            <a:schemeClr val="accent1"/>
+          </a:fillRef>
+          <a:effectRef idx="0">
+            <a:schemeClr val="accent1"/>
+          </a:effectRef>
+          <a:fontRef idx="minor">
+            <a:schemeClr val="lt1"/>
+          </a:fontRef>
+        </p:style>
+        <p:txBody>
+          <a:bodyPr rtlCol="0" anchor="ctr"/>
+          <a:lstStyle/>
+          <a:p>
+            <a:pPr algn="ctr"/>
+            <a:endParaRPr lang="es-MX"/>
+          </a:p>
+        </p:txBody>
+      </p:sp>
+      <p:sp>
+        <p:nvSpPr>
+          <p:cNvPr id="16" name="Content Placeholder 2">
+            <a:extLst>
+              <a:ext uri="{FF2B5EF4-FFF2-40B4-BE49-F238E27FC236}">
+                <a16:creationId xmlns:a16="http://schemas.microsoft.com/office/drawing/2014/main" id="{5FA6BE96-DD28-4762-A404-4EEA7640E2ED}"/>
+              </a:ext>
+            </a:extLst>
+          </p:cNvPr>
+          <p:cNvSpPr txBox="1">
+            <a:spLocks/>
+          </p:cNvSpPr>
+          <p:nvPr/>
+        </p:nvSpPr>
+        <p:spPr>
+          <a:xfrm>
+            <a:off x="3120843" y="5051819"/>
+            <a:ext cx="5950312" cy="933871"/>
+          </a:xfrm>
+          <a:prstGeom prst="rect">
+            <a:avLst/>
+          </a:prstGeom>
+        </p:spPr>
+        <p:txBody>
+          <a:bodyPr vert="horz" lIns="91440" tIns="45720" rIns="91440" bIns="45720" rtlCol="0">
+            <a:normAutofit/>
+          </a:bodyPr>
+          <a:lstStyle>
+            <a:lvl1pPr marL="342900" indent="-342900" algn="l" defTabSz="457200" rtl="0" eaLnBrk="1" latinLnBrk="0" hangingPunct="1">
+              <a:spcBef>
+                <a:spcPts val="1000"/>
+              </a:spcBef>
+              <a:spcAft>
+                <a:spcPts val="0"/>
+              </a:spcAft>
+              <a:buClr>
+                <a:schemeClr val="accent1"/>
+              </a:buClr>
+              <a:buFont typeface="Wingdings 3" charset="2"/>
+              <a:buChar char=""/>
+              <a:defRPr sz="1800" kern="1200">
+                <a:solidFill>
+                  <a:schemeClr val="tx1">
+                    <a:lumMod val="75000"/>
+                    <a:lumOff val="25000"/>
+                  </a:schemeClr>
+                </a:solidFill>
+                <a:latin typeface="+mn-lt"/>
+                <a:ea typeface="+mn-ea"/>
+                <a:cs typeface="+mn-cs"/>
+              </a:defRPr>
+            </a:lvl1pPr>
+            <a:lvl2pPr marL="742950" indent="-285750" algn="l" defTabSz="457200" rtl="0" eaLnBrk="1" latinLnBrk="0" hangingPunct="1">
+              <a:spcBef>
+                <a:spcPts val="1000"/>
+              </a:spcBef>
+              <a:spcAft>
+                <a:spcPts val="0"/>
+              </a:spcAft>
+              <a:buClr>
+                <a:schemeClr val="accent1"/>
+              </a:buClr>
+              <a:buFont typeface="Wingdings 3" charset="2"/>
+              <a:buChar char=""/>
+              <a:defRPr sz="1600" kern="1200">
+                <a:solidFill>
+                  <a:schemeClr val="tx1">
+                    <a:lumMod val="75000"/>
+                    <a:lumOff val="25000"/>
+                  </a:schemeClr>
+                </a:solidFill>
+                <a:latin typeface="+mn-lt"/>
+                <a:ea typeface="+mn-ea"/>
+                <a:cs typeface="+mn-cs"/>
+              </a:defRPr>
+            </a:lvl2pPr>
+            <a:lvl3pPr marL="1143000" indent="-228600" algn="l" defTabSz="457200" rtl="0" eaLnBrk="1" latinLnBrk="0" hangingPunct="1">
+              <a:spcBef>
+                <a:spcPts val="1000"/>
+              </a:spcBef>
+              <a:spcAft>
+                <a:spcPts val="0"/>
+              </a:spcAft>
+              <a:buClr>
+                <a:schemeClr val="accent1"/>
+              </a:buClr>
+              <a:buFont typeface="Wingdings 3" charset="2"/>
+              <a:buChar char=""/>
+              <a:defRPr sz="1400" kern="1200">
+                <a:solidFill>
+                  <a:schemeClr val="tx1">
+                    <a:lumMod val="75000"/>
+                    <a:lumOff val="25000"/>
+                  </a:schemeClr>
+                </a:solidFill>
+                <a:latin typeface="+mn-lt"/>
+                <a:ea typeface="+mn-ea"/>
+                <a:cs typeface="+mn-cs"/>
+              </a:defRPr>
+            </a:lvl3pPr>
+            <a:lvl4pPr marL="1600200" indent="-228600" algn="l" defTabSz="457200" rtl="0" eaLnBrk="1" latinLnBrk="0" hangingPunct="1">
+              <a:spcBef>
+                <a:spcPts val="1000"/>
+              </a:spcBef>
+              <a:spcAft>
+                <a:spcPts val="0"/>
+              </a:spcAft>
+              <a:buClr>
+                <a:schemeClr val="accent1"/>
+              </a:buClr>
+              <a:buFont typeface="Wingdings 3" charset="2"/>
+              <a:buChar char=""/>
+              <a:defRPr sz="1200" kern="1200">
+                <a:solidFill>
+                  <a:schemeClr val="tx1">
+                    <a:lumMod val="75000"/>
+                    <a:lumOff val="25000"/>
+                  </a:schemeClr>
+                </a:solidFill>
+                <a:latin typeface="+mn-lt"/>
+                <a:ea typeface="+mn-ea"/>
+                <a:cs typeface="+mn-cs"/>
+              </a:defRPr>
+            </a:lvl4pPr>
+            <a:lvl5pPr marL="2057400" indent="-228600" algn="l" defTabSz="457200" rtl="0" eaLnBrk="1" latinLnBrk="0" hangingPunct="1">
+              <a:spcBef>
+                <a:spcPts val="1000"/>
+              </a:spcBef>
+              <a:spcAft>
+                <a:spcPts val="0"/>
+              </a:spcAft>
+              <a:buClr>
+                <a:schemeClr val="accent1"/>
+              </a:buClr>
+              <a:buFont typeface="Wingdings 3" charset="2"/>
+              <a:buChar char=""/>
+              <a:defRPr sz="1200" kern="1200">
+                <a:solidFill>
+                  <a:schemeClr val="tx1">
+                    <a:lumMod val="75000"/>
+                    <a:lumOff val="25000"/>
+                  </a:schemeClr>
+                </a:solidFill>
+                <a:latin typeface="+mn-lt"/>
+                <a:ea typeface="+mn-ea"/>
+                <a:cs typeface="+mn-cs"/>
+              </a:defRPr>
+            </a:lvl5pPr>
+            <a:lvl6pPr marL="2514600" indent="-228600" algn="l" defTabSz="457200" rtl="0" eaLnBrk="1" latinLnBrk="0" hangingPunct="1">
+              <a:spcBef>
+                <a:spcPts val="1000"/>
+              </a:spcBef>
+              <a:spcAft>
+                <a:spcPts val="0"/>
+              </a:spcAft>
+              <a:buClr>
+                <a:schemeClr val="accent1"/>
+              </a:buClr>
+              <a:buFont typeface="Wingdings 3" charset="2"/>
+              <a:buChar char=""/>
+              <a:defRPr sz="1200" kern="1200">
+                <a:solidFill>
+                  <a:schemeClr val="tx1">
+                    <a:lumMod val="75000"/>
+                    <a:lumOff val="25000"/>
+                  </a:schemeClr>
+                </a:solidFill>
+                <a:latin typeface="+mn-lt"/>
+                <a:ea typeface="+mn-ea"/>
+                <a:cs typeface="+mn-cs"/>
+              </a:defRPr>
+            </a:lvl6pPr>
+            <a:lvl7pPr marL="2971800" indent="-228600" algn="l" defTabSz="457200" rtl="0" eaLnBrk="1" latinLnBrk="0" hangingPunct="1">
+              <a:spcBef>
+                <a:spcPts val="1000"/>
+              </a:spcBef>
+              <a:spcAft>
+                <a:spcPts val="0"/>
+              </a:spcAft>
+              <a:buClr>
+                <a:schemeClr val="accent1"/>
+              </a:buClr>
+              <a:buFont typeface="Wingdings 3" charset="2"/>
+              <a:buChar char=""/>
+              <a:defRPr sz="1200" kern="1200">
+                <a:solidFill>
+                  <a:schemeClr val="tx1">
+                    <a:lumMod val="75000"/>
+                    <a:lumOff val="25000"/>
+                  </a:schemeClr>
+                </a:solidFill>
+                <a:latin typeface="+mn-lt"/>
+                <a:ea typeface="+mn-ea"/>
+                <a:cs typeface="+mn-cs"/>
+              </a:defRPr>
+            </a:lvl7pPr>
+            <a:lvl8pPr marL="3429000" indent="-228600" algn="l" defTabSz="457200" rtl="0" eaLnBrk="1" latinLnBrk="0" hangingPunct="1">
+              <a:spcBef>
+                <a:spcPts val="1000"/>
+              </a:spcBef>
+              <a:spcAft>
+                <a:spcPts val="0"/>
+              </a:spcAft>
+              <a:buClr>
+                <a:schemeClr val="accent1"/>
+              </a:buClr>
+              <a:buFont typeface="Wingdings 3" charset="2"/>
+              <a:buChar char=""/>
+              <a:defRPr sz="1200" kern="1200">
+                <a:solidFill>
+                  <a:schemeClr val="tx1">
+                    <a:lumMod val="75000"/>
+                    <a:lumOff val="25000"/>
+                  </a:schemeClr>
+                </a:solidFill>
+                <a:latin typeface="+mn-lt"/>
+                <a:ea typeface="+mn-ea"/>
+                <a:cs typeface="+mn-cs"/>
+              </a:defRPr>
+            </a:lvl8pPr>
+            <a:lvl9pPr marL="3886200" indent="-228600" algn="l" defTabSz="457200" rtl="0" eaLnBrk="1" latinLnBrk="0" hangingPunct="1">
+              <a:spcBef>
+                <a:spcPts val="1000"/>
+              </a:spcBef>
+              <a:spcAft>
+                <a:spcPts val="0"/>
+              </a:spcAft>
+              <a:buClr>
+                <a:schemeClr val="accent1"/>
+              </a:buClr>
+              <a:buFont typeface="Wingdings 3" charset="2"/>
+              <a:buChar char=""/>
+              <a:defRPr sz="1200" kern="1200">
+                <a:solidFill>
+                  <a:schemeClr val="tx1">
+                    <a:lumMod val="75000"/>
+                    <a:lumOff val="25000"/>
+                  </a:schemeClr>
+                </a:solidFill>
+                <a:latin typeface="+mn-lt"/>
+                <a:ea typeface="+mn-ea"/>
+                <a:cs typeface="+mn-cs"/>
+              </a:defRPr>
+            </a:lvl9pPr>
+          </a:lstStyle>
+          <a:p>
+            <a:pPr marL="0" indent="0">
+              <a:spcBef>
+                <a:spcPts val="0"/>
+              </a:spcBef>
+              <a:buNone/>
+            </a:pPr>
+            <a:r>
+              <a:rPr lang="es-ES" sz="1700" i="1" dirty="0">
+                <a:solidFill>
+                  <a:srgbClr val="545454"/>
+                </a:solidFill>
+              </a:rPr>
+              <a:t>Diversidad de las tres ciudades de Estado de Hidalgo que fueron </a:t>
+            </a:r>
+          </a:p>
+          <a:p>
+            <a:pPr marL="0" indent="0">
+              <a:spcBef>
+                <a:spcPts val="0"/>
+              </a:spcBef>
+              <a:buNone/>
+            </a:pPr>
+            <a:r>
+              <a:rPr lang="es-ES" sz="1700" i="1" dirty="0">
+                <a:solidFill>
+                  <a:srgbClr val="545454"/>
+                </a:solidFill>
+              </a:rPr>
+              <a:t>contempladas</a:t>
+            </a:r>
+            <a:endParaRPr lang="es-MX" sz="1700" dirty="0"/>
+          </a:p>
+          <a:p>
+            <a:pPr marL="0" indent="0">
+              <a:buFont typeface="Wingdings 3" charset="2"/>
+              <a:buNone/>
+            </a:pPr>
+            <a:endParaRPr lang="es-MX" sz="2000" dirty="0"/>
+          </a:p>
+          <a:p>
+            <a:pPr marL="0" indent="0">
+              <a:buFont typeface="Wingdings 3" charset="2"/>
+              <a:buNone/>
+            </a:pPr>
+            <a:endParaRPr lang="es-MX" sz="2000" dirty="0"/>
+          </a:p>
+        </p:txBody>
+      </p:sp>
+      <p:sp>
+        <p:nvSpPr>
+          <p:cNvPr id="21" name="Title 1">
+            <a:extLst>
+              <a:ext uri="{FF2B5EF4-FFF2-40B4-BE49-F238E27FC236}">
+                <a16:creationId xmlns:a16="http://schemas.microsoft.com/office/drawing/2014/main" id="{8A01CD78-1F69-4F41-8016-5AA1A4A0B7FB}"/>
+              </a:ext>
+            </a:extLst>
+          </p:cNvPr>
+          <p:cNvSpPr txBox="1">
+            <a:spLocks/>
+          </p:cNvSpPr>
+          <p:nvPr/>
+        </p:nvSpPr>
+        <p:spPr>
+          <a:xfrm>
+            <a:off x="602876" y="-133709"/>
+            <a:ext cx="10986247" cy="1450757"/>
+          </a:xfrm>
+          <a:prstGeom prst="rect">
+            <a:avLst/>
+          </a:prstGeom>
+        </p:spPr>
+        <p:txBody>
+          <a:bodyPr vert="horz" lIns="91440" tIns="45720" rIns="91440" bIns="45720" rtlCol="0" anchor="ctr">
+            <a:normAutofit/>
+          </a:bodyPr>
+          <a:lstStyle>
+            <a:lvl1pPr algn="l" defTabSz="914400" rtl="0" eaLnBrk="1" latinLnBrk="0" hangingPunct="1">
+              <a:lnSpc>
+                <a:spcPct val="90000"/>
+              </a:lnSpc>
+              <a:spcBef>
+                <a:spcPct val="0"/>
+              </a:spcBef>
+              <a:buNone/>
+              <a:defRPr sz="4400" kern="1200">
+                <a:solidFill>
+                  <a:schemeClr val="tx1"/>
+                </a:solidFill>
+                <a:latin typeface="+mj-lt"/>
+                <a:ea typeface="+mj-ea"/>
+                <a:cs typeface="+mj-cs"/>
+              </a:defRPr>
+            </a:lvl1pPr>
+          </a:lstStyle>
+          <a:p>
+            <a:r>
+              <a:rPr lang="es-MX" sz="4000" b="1" dirty="0">
+                <a:solidFill>
+                  <a:schemeClr val="bg1"/>
+                </a:solidFill>
+                <a:latin typeface="Montserrat"/>
+              </a:rPr>
+              <a:t>Comparación de resultados (Ubicuidad)</a:t>
+            </a:r>
+          </a:p>
+        </p:txBody>
+      </p:sp>
+      <p:pic>
+        <p:nvPicPr>
+          <p:cNvPr id="6" name="Picture 5">
+            <a:extLst>
+              <a:ext uri="{FF2B5EF4-FFF2-40B4-BE49-F238E27FC236}">
+                <a16:creationId xmlns:a16="http://schemas.microsoft.com/office/drawing/2014/main" id="{C9A7B53A-3AFD-4FC8-8B10-5CAD0EA6910C}"/>
+              </a:ext>
+            </a:extLst>
+          </p:cNvPr>
+          <p:cNvPicPr>
+            <a:picLocks noChangeAspect="1"/>
+          </p:cNvPicPr>
+          <p:nvPr/>
+        </p:nvPicPr>
+        <p:blipFill>
+          <a:blip r:embed="rId2"/>
+          <a:stretch>
+            <a:fillRect/>
+          </a:stretch>
+        </p:blipFill>
+        <p:spPr>
+          <a:xfrm>
+            <a:off x="3136670" y="4155679"/>
+            <a:ext cx="5950336" cy="448069"/>
+          </a:xfrm>
+          <a:prstGeom prst="rect">
+            <a:avLst/>
+          </a:prstGeom>
+        </p:spPr>
+      </p:pic>
+      <p:pic>
+        <p:nvPicPr>
+          <p:cNvPr id="8" name="Picture 7">
+            <a:extLst>
+              <a:ext uri="{FF2B5EF4-FFF2-40B4-BE49-F238E27FC236}">
+                <a16:creationId xmlns:a16="http://schemas.microsoft.com/office/drawing/2014/main" id="{68B1E657-2D60-4498-97DF-1E65F9DD57FC}"/>
+              </a:ext>
+            </a:extLst>
+          </p:cNvPr>
+          <p:cNvPicPr>
+            <a:picLocks noChangeAspect="1"/>
+          </p:cNvPicPr>
+          <p:nvPr/>
+        </p:nvPicPr>
+        <p:blipFill rotWithShape="1">
+          <a:blip r:embed="rId3"/>
+          <a:srcRect l="685" t="9226" r="1845" b="10130"/>
+          <a:stretch/>
+        </p:blipFill>
+        <p:spPr>
+          <a:xfrm>
+            <a:off x="3136670" y="4603748"/>
+            <a:ext cx="5950336" cy="448071"/>
+          </a:xfrm>
+          <a:prstGeom prst="rect">
+            <a:avLst/>
+          </a:prstGeom>
+        </p:spPr>
+      </p:pic>
+      <p:pic>
+        <p:nvPicPr>
+          <p:cNvPr id="9" name="Picture 8">
+            <a:extLst>
+              <a:ext uri="{FF2B5EF4-FFF2-40B4-BE49-F238E27FC236}">
+                <a16:creationId xmlns:a16="http://schemas.microsoft.com/office/drawing/2014/main" id="{F171EA86-66CF-4F81-92A2-C3AC83E5008E}"/>
+              </a:ext>
+            </a:extLst>
+          </p:cNvPr>
+          <p:cNvPicPr>
+            <a:picLocks noChangeAspect="1"/>
+          </p:cNvPicPr>
+          <p:nvPr/>
+        </p:nvPicPr>
+        <p:blipFill rotWithShape="1">
+          <a:blip r:embed="rId4"/>
+          <a:srcRect l="1556" t="17142" r="1651" b="11429"/>
+          <a:stretch/>
+        </p:blipFill>
+        <p:spPr>
+          <a:xfrm>
+            <a:off x="3136694" y="3741262"/>
+            <a:ext cx="5950312" cy="448069"/>
+          </a:xfrm>
+          <a:prstGeom prst="rect">
+            <a:avLst/>
+          </a:prstGeom>
+        </p:spPr>
+      </p:pic>
+      <p:pic>
+        <p:nvPicPr>
+          <p:cNvPr id="10" name="Picture 9">
+            <a:extLst>
+              <a:ext uri="{FF2B5EF4-FFF2-40B4-BE49-F238E27FC236}">
+                <a16:creationId xmlns:a16="http://schemas.microsoft.com/office/drawing/2014/main" id="{A9AA28CD-C223-47CA-8FCA-5C486F1A0E55}"/>
+              </a:ext>
+            </a:extLst>
+          </p:cNvPr>
+          <p:cNvPicPr>
+            <a:picLocks noChangeAspect="1"/>
+          </p:cNvPicPr>
+          <p:nvPr/>
+        </p:nvPicPr>
+        <p:blipFill rotWithShape="1">
+          <a:blip r:embed="rId5"/>
+          <a:srcRect l="896" t="-1" b="19866"/>
+          <a:stretch/>
+        </p:blipFill>
+        <p:spPr>
+          <a:xfrm>
+            <a:off x="3136693" y="3390706"/>
+            <a:ext cx="5972561" cy="344699"/>
+          </a:xfrm>
+          <a:prstGeom prst="rect">
+            <a:avLst/>
+          </a:prstGeom>
+        </p:spPr>
+      </p:pic>
+      <p:sp>
+        <p:nvSpPr>
+          <p:cNvPr id="12" name="Rectangle 11">
+            <a:extLst>
+              <a:ext uri="{FF2B5EF4-FFF2-40B4-BE49-F238E27FC236}">
+                <a16:creationId xmlns:a16="http://schemas.microsoft.com/office/drawing/2014/main" id="{34DE2593-2C05-4319-A048-FC473911420F}"/>
+              </a:ext>
+            </a:extLst>
+          </p:cNvPr>
+          <p:cNvSpPr/>
+          <p:nvPr/>
+        </p:nvSpPr>
+        <p:spPr>
+          <a:xfrm>
+            <a:off x="3136669" y="3401793"/>
+            <a:ext cx="5950312" cy="1650026"/>
+          </a:xfrm>
+          <a:prstGeom prst="rect">
+            <a:avLst/>
+          </a:prstGeom>
+          <a:noFill/>
+          <a:ln w="28575">
+            <a:solidFill>
+              <a:srgbClr val="A9A9A9"/>
+            </a:solidFill>
+          </a:ln>
+        </p:spPr>
+        <p:style>
+          <a:lnRef idx="2">
+            <a:schemeClr val="accent1">
+              <a:shade val="50000"/>
+            </a:schemeClr>
+          </a:lnRef>
+          <a:fillRef idx="1">
+            <a:schemeClr val="accent1"/>
+          </a:fillRef>
+          <a:effectRef idx="0">
+            <a:schemeClr val="accent1"/>
+          </a:effectRef>
+          <a:fontRef idx="minor">
+            <a:schemeClr val="lt1"/>
+          </a:fontRef>
+        </p:style>
+        <p:txBody>
+          <a:bodyPr rtlCol="0" anchor="ctr"/>
+          <a:lstStyle/>
+          <a:p>
+            <a:pPr algn="ctr"/>
+            <a:endParaRPr lang="es-MX"/>
+          </a:p>
+        </p:txBody>
+      </p:sp>
+      <p:sp>
+        <p:nvSpPr>
+          <p:cNvPr id="13" name="Star: 5 Points 12">
+            <a:extLst>
+              <a:ext uri="{FF2B5EF4-FFF2-40B4-BE49-F238E27FC236}">
+                <a16:creationId xmlns:a16="http://schemas.microsoft.com/office/drawing/2014/main" id="{DAE45056-CD0A-44CC-A109-6900D0E447A7}"/>
+              </a:ext>
+            </a:extLst>
+          </p:cNvPr>
+          <p:cNvSpPr/>
+          <p:nvPr/>
+        </p:nvSpPr>
+        <p:spPr>
+          <a:xfrm>
+            <a:off x="2734582" y="3595162"/>
+            <a:ext cx="558800" cy="517672"/>
+          </a:xfrm>
+          <a:prstGeom prst="star5">
+            <a:avLst>
+              <a:gd name="adj" fmla="val 27738"/>
+              <a:gd name="hf" fmla="val 105146"/>
+              <a:gd name="vf" fmla="val 110557"/>
+            </a:avLst>
+          </a:prstGeom>
+          <a:solidFill>
+            <a:srgbClr val="FFFF00"/>
+          </a:solidFill>
+          <a:ln>
+            <a:solidFill>
+              <a:srgbClr val="FFC000"/>
+            </a:solidFill>
+          </a:ln>
+        </p:spPr>
+        <p:style>
+          <a:lnRef idx="2">
+            <a:schemeClr val="accent1">
+              <a:shade val="50000"/>
+            </a:schemeClr>
+          </a:lnRef>
+          <a:fillRef idx="1">
+            <a:schemeClr val="accent1"/>
+          </a:fillRef>
+          <a:effectRef idx="0">
+            <a:schemeClr val="accent1"/>
+          </a:effectRef>
+          <a:fontRef idx="minor">
+            <a:schemeClr val="lt1"/>
+          </a:fontRef>
+        </p:style>
+        <p:txBody>
+          <a:bodyPr rtlCol="0" anchor="ctr"/>
+          <a:lstStyle/>
+          <a:p>
+            <a:pPr algn="ctr"/>
+            <a:endParaRPr lang="es-MX"/>
+          </a:p>
+        </p:txBody>
+      </p:sp>
+      <p:sp>
+        <p:nvSpPr>
+          <p:cNvPr id="14" name="TextBox 13">
+            <a:extLst>
+              <a:ext uri="{FF2B5EF4-FFF2-40B4-BE49-F238E27FC236}">
+                <a16:creationId xmlns:a16="http://schemas.microsoft.com/office/drawing/2014/main" id="{112CE1A3-0DD9-465D-A258-2AF6451FA1A8}"/>
+              </a:ext>
+            </a:extLst>
+          </p:cNvPr>
+          <p:cNvSpPr txBox="1"/>
+          <p:nvPr/>
+        </p:nvSpPr>
+        <p:spPr>
+          <a:xfrm>
+            <a:off x="2499632" y="3707608"/>
+            <a:ext cx="1028700" cy="369332"/>
+          </a:xfrm>
+          <a:prstGeom prst="rect">
+            <a:avLst/>
+          </a:prstGeom>
+          <a:noFill/>
+        </p:spPr>
+        <p:txBody>
+          <a:bodyPr wrap="square" rtlCol="0">
+            <a:spAutoFit/>
+          </a:bodyPr>
+          <a:lstStyle/>
+          <a:p>
+            <a:pPr algn="ctr"/>
             <a:r>
               <a:rPr lang="es-MX" dirty="0"/>
-              <a:t>Conclusiones</a:t>
+              <a:t>1</a:t>
             </a:r>
           </a:p>
         </p:txBody>
       </p:sp>
+    </p:spTree>
+    <p:extLst>
+      <p:ext uri="{BB962C8B-B14F-4D97-AF65-F5344CB8AC3E}">
+        <p14:creationId xmlns:p14="http://schemas.microsoft.com/office/powerpoint/2010/main" val="553476724"/>
+      </p:ext>
+    </p:extLst>
+  </p:cSld>
+  <p:clrMapOvr>
+    <a:masterClrMapping/>
+  </p:clrMapOvr>
+</p:sld>
+</file>
+
+<file path=ppt/slides/slide15.xml><?xml version="1.0" encoding="utf-8"?>
+<p:sld xmlns:a="http://schemas.openxmlformats.org/drawingml/2006/main" xmlns:r="http://schemas.openxmlformats.org/officeDocument/2006/relationships" xmlns:p="http://schemas.openxmlformats.org/presentationml/2006/main">
+  <p:cSld>
+    <p:spTree>
+      <p:nvGrpSpPr>
+        <p:cNvPr id="1" name=""/>
+        <p:cNvGrpSpPr/>
+        <p:nvPr/>
+      </p:nvGrpSpPr>
+      <p:grpSpPr>
+        <a:xfrm>
+          <a:off x="0" y="0"/>
+          <a:ext cx="0" cy="0"/>
+          <a:chOff x="0" y="0"/>
+          <a:chExt cx="0" cy="0"/>
+        </a:xfrm>
+      </p:grpSpPr>
       <p:sp>
         <p:nvSpPr>
           <p:cNvPr id="3" name="Content Placeholder 2">
@@ -6172,6 +7425,65 @@
           </a:p>
         </p:txBody>
       </p:sp>
+      <p:sp>
+        <p:nvSpPr>
+          <p:cNvPr id="7" name="Title 1">
+            <a:extLst>
+              <a:ext uri="{FF2B5EF4-FFF2-40B4-BE49-F238E27FC236}">
+                <a16:creationId xmlns:a16="http://schemas.microsoft.com/office/drawing/2014/main" id="{E4AD72B9-B4B6-4B5A-A413-C6FB43D2D4C4}"/>
+              </a:ext>
+            </a:extLst>
+          </p:cNvPr>
+          <p:cNvSpPr txBox="1">
+            <a:spLocks/>
+          </p:cNvSpPr>
+          <p:nvPr/>
+        </p:nvSpPr>
+        <p:spPr>
+          <a:xfrm>
+            <a:off x="602876" y="-133709"/>
+            <a:ext cx="10986247" cy="1450757"/>
+          </a:xfrm>
+          <a:prstGeom prst="rect">
+            <a:avLst/>
+          </a:prstGeom>
+        </p:spPr>
+        <p:txBody>
+          <a:bodyPr vert="horz" lIns="91440" tIns="45720" rIns="91440" bIns="45720" rtlCol="0" anchor="ctr">
+            <a:normAutofit/>
+          </a:bodyPr>
+          <a:lstStyle>
+            <a:lvl1pPr algn="l" defTabSz="914400" rtl="0" eaLnBrk="1" latinLnBrk="0" hangingPunct="1">
+              <a:lnSpc>
+                <a:spcPct val="90000"/>
+              </a:lnSpc>
+              <a:spcBef>
+                <a:spcPct val="0"/>
+              </a:spcBef>
+              <a:buNone/>
+              <a:defRPr sz="4400" kern="1200">
+                <a:solidFill>
+                  <a:schemeClr val="tx1"/>
+                </a:solidFill>
+                <a:latin typeface="+mj-lt"/>
+                <a:ea typeface="+mj-ea"/>
+                <a:cs typeface="+mj-cs"/>
+              </a:defRPr>
+            </a:lvl1pPr>
+          </a:lstStyle>
+          <a:p>
+            <a:r>
+              <a:rPr lang="es-MX" sz="4000" b="1" dirty="0">
+                <a:solidFill>
+                  <a:schemeClr val="bg1"/>
+                </a:solidFill>
+                <a:latin typeface="Montserrat"/>
+              </a:rPr>
+              <a:t>Conclusión</a:t>
+            </a:r>
+          </a:p>
+        </p:txBody>
+      </p:sp>
     </p:spTree>
     <p:extLst>
       <p:ext uri="{BB962C8B-B14F-4D97-AF65-F5344CB8AC3E}">
@@ -6185,7 +7497,7 @@
 </p:sld>
 </file>
 
-<file path=ppt/slides/slide14.xml><?xml version="1.0" encoding="utf-8"?>
+<file path=ppt/slides/slide16.xml><?xml version="1.0" encoding="utf-8"?>
 <p:sld xmlns:a="http://schemas.openxmlformats.org/drawingml/2006/main" xmlns:r="http://schemas.openxmlformats.org/officeDocument/2006/relationships" xmlns:p="http://schemas.openxmlformats.org/presentationml/2006/main">
   <p:cSld>
     <p:spTree>
@@ -6932,7 +8244,7 @@
               <a:rPr lang="es-MX" sz="2200" dirty="0">
                 <a:latin typeface="Montserrat"/>
               </a:rPr>
-              <a:t>La idea ahora es buscar para cada producto aquellas ciudades que cuenten con una estabilidad y una variabilidad “fuertes” y posteriormente poner especial atención en aquellos en los que al menos una de las tres ciudades de Hidalgo se encuentre. Siendo estas:</a:t>
+              <a:t>La idea ahora es buscar para cada producto aquellas ciudades que cuenten con una estabilidad “fuerte” y una variabilidad “baja” y posteriormente poner especial atención en aquellos en los que al menos una de las tres ciudades de Hidalgo se encuentre. Siendo estas:</a:t>
             </a:r>
           </a:p>
           <a:p>
@@ -6942,7 +8254,10 @@
               </a:lnSpc>
             </a:pPr>
             <a:r>
-              <a:rPr lang="es-MX" sz="2200" dirty="0">
+              <a:rPr lang="es-MX" sz="2200" b="1" dirty="0">
+                <a:solidFill>
+                  <a:srgbClr val="92081C"/>
+                </a:solidFill>
                 <a:latin typeface="Montserrat" panose="00000500000000000000" pitchFamily="50" charset="0"/>
               </a:rPr>
               <a:t>Pachuca de Soto</a:t>
@@ -6955,7 +8270,10 @@
               </a:lnSpc>
             </a:pPr>
             <a:r>
-              <a:rPr lang="es-MX" sz="2200" dirty="0">
+              <a:rPr lang="es-MX" sz="2200" b="1" dirty="0">
+                <a:solidFill>
+                  <a:srgbClr val="92081C"/>
+                </a:solidFill>
                 <a:latin typeface="Montserrat" panose="00000500000000000000" pitchFamily="50" charset="0"/>
               </a:rPr>
               <a:t>Tulancingo</a:t>
@@ -6968,7 +8286,10 @@
               </a:lnSpc>
             </a:pPr>
             <a:r>
-              <a:rPr lang="es-MX" sz="2200" dirty="0">
+              <a:rPr lang="es-MX" sz="2200" b="1" dirty="0">
+                <a:solidFill>
+                  <a:srgbClr val="92081C"/>
+                </a:solidFill>
                 <a:latin typeface="Montserrat" panose="00000500000000000000" pitchFamily="50" charset="0"/>
               </a:rPr>
               <a:t>Área Metropolitana de la Ciudad de México (incluye Tizayuca)</a:t>
@@ -7285,7 +8606,7 @@
               <a:rPr lang="es-MX" sz="1700" dirty="0">
                 <a:latin typeface="Montserrat" panose="00000500000000000000" pitchFamily="50" charset="0"/>
               </a:rPr>
-              <a:t>Para definir a una estabilidad o a una variabilidad como fuerte naturalmente nos podemos fijar en aquellas que tengan valores bajos. En dicho caso, surge la pregunta</a:t>
+              <a:t>Para definir a una estabilidad como fuerte o a una variabilidad como baja naturalmente nos podemos fijar en aquellas que tengan valores bajos. En dicho caso, surge la pregunta</a:t>
             </a:r>
           </a:p>
           <a:p>
@@ -7712,8 +9033,8 @@
           </p:sp>
         </mc:Fallback>
       </mc:AlternateContent>
-      <mc:AlternateContent xmlns:mc="http://schemas.openxmlformats.org/markup-compatibility/2006" xmlns:a14="http://schemas.microsoft.com/office/drawing/2010/main">
-        <mc:Choice Requires="a14">
+      <mc:AlternateContent xmlns:mc="http://schemas.openxmlformats.org/markup-compatibility/2006">
+        <mc:Choice xmlns:a14="http://schemas.microsoft.com/office/drawing/2010/main" Requires="a14">
           <p:sp>
             <p:nvSpPr>
               <p:cNvPr id="7" name="Content Placeholder 2">
@@ -9045,8 +10366,75 @@
                           </a:solidFill>
                           <a:latin typeface="Cambria Math" panose="02040503050406030204" pitchFamily="18" charset="0"/>
                         </a:rPr>
-                        <m:t>𝑪𝒐𝒎𝒑𝒆𝒕𝒊𝒕𝒊𝒗𝒂</m:t>
+                        <m:t>𝑪𝒐𝒎𝒑𝒆𝒕𝒊𝒕𝒊𝒗</m:t>
                       </m:r>
+                      <m:sSub>
+                        <m:sSubPr>
+                          <m:ctrlPr>
+                            <a:rPr lang="es-ES" sz="2000" b="1" i="1" smtClean="0">
+                              <a:solidFill>
+                                <a:schemeClr val="tx1">
+                                  <a:lumMod val="85000"/>
+                                  <a:lumOff val="15000"/>
+                                </a:schemeClr>
+                              </a:solidFill>
+                              <a:latin typeface="Cambria Math" panose="02040503050406030204" pitchFamily="18" charset="0"/>
+                            </a:rPr>
+                          </m:ctrlPr>
+                        </m:sSubPr>
+                        <m:e>
+                          <m:r>
+                            <a:rPr lang="es-ES" sz="2000" b="1" i="1" smtClean="0">
+                              <a:solidFill>
+                                <a:schemeClr val="tx1">
+                                  <a:lumMod val="85000"/>
+                                  <a:lumOff val="15000"/>
+                                </a:schemeClr>
+                              </a:solidFill>
+                              <a:latin typeface="Cambria Math" panose="02040503050406030204" pitchFamily="18" charset="0"/>
+                            </a:rPr>
+                            <m:t>𝒂</m:t>
+                          </m:r>
+                        </m:e>
+                        <m:sub>
+                          <m:r>
+                            <a:rPr lang="es-ES" sz="2000" b="1" i="1" smtClean="0">
+                              <a:solidFill>
+                                <a:schemeClr val="tx1">
+                                  <a:lumMod val="85000"/>
+                                  <a:lumOff val="15000"/>
+                                </a:schemeClr>
+                              </a:solidFill>
+                              <a:latin typeface="Cambria Math" panose="02040503050406030204" pitchFamily="18" charset="0"/>
+                            </a:rPr>
+                            <m:t>𝒄</m:t>
+                          </m:r>
+                          <m:r>
+                            <a:rPr lang="es-ES" sz="2000" b="1" i="1" smtClean="0">
+                              <a:solidFill>
+                                <a:schemeClr val="tx1">
+                                  <a:lumMod val="85000"/>
+                                  <a:lumOff val="15000"/>
+                                </a:schemeClr>
+                              </a:solidFill>
+                              <a:latin typeface="Cambria Math" panose="02040503050406030204" pitchFamily="18" charset="0"/>
+                            </a:rPr>
+                            <m:t>,</m:t>
+                          </m:r>
+                          <m:r>
+                            <a:rPr lang="es-ES" sz="2000" b="1" i="1" smtClean="0">
+                              <a:solidFill>
+                                <a:schemeClr val="tx1">
+                                  <a:lumMod val="85000"/>
+                                  <a:lumOff val="15000"/>
+                                </a:schemeClr>
+                              </a:solidFill>
+                              <a:latin typeface="Cambria Math" panose="02040503050406030204" pitchFamily="18" charset="0"/>
+                            </a:rPr>
+                            <m:t>𝒈</m:t>
+                          </m:r>
+                        </m:sub>
+                      </m:sSub>
                       <m:r>
                         <a:rPr lang="es-ES" sz="2000" b="1" i="1" smtClean="0">
                           <a:solidFill>
@@ -9097,8 +10485,80 @@
                           <a:latin typeface="Cambria Math" panose="02040503050406030204" pitchFamily="18" charset="0"/>
                           <a:ea typeface="Cambria Math" panose="02040503050406030204" pitchFamily="18" charset="0"/>
                         </a:rPr>
-                        <m:t>𝑪𝒐𝒎𝒑𝒆𝒕𝒊𝒕𝒊𝒗𝒂</m:t>
+                        <m:t>𝑪𝒐𝒎𝒑𝒆𝒕𝒊𝒕𝒊𝒗</m:t>
                       </m:r>
+                      <m:sSub>
+                        <m:sSubPr>
+                          <m:ctrlPr>
+                            <a:rPr lang="es-ES" sz="2000" b="1" i="1" smtClean="0">
+                              <a:solidFill>
+                                <a:schemeClr val="tx1">
+                                  <a:lumMod val="85000"/>
+                                  <a:lumOff val="15000"/>
+                                </a:schemeClr>
+                              </a:solidFill>
+                              <a:latin typeface="Cambria Math" panose="02040503050406030204" pitchFamily="18" charset="0"/>
+                              <a:ea typeface="Cambria Math" panose="02040503050406030204" pitchFamily="18" charset="0"/>
+                            </a:rPr>
+                          </m:ctrlPr>
+                        </m:sSubPr>
+                        <m:e>
+                          <m:r>
+                            <a:rPr lang="es-ES" sz="2000" b="1" i="1" smtClean="0">
+                              <a:solidFill>
+                                <a:schemeClr val="tx1">
+                                  <a:lumMod val="85000"/>
+                                  <a:lumOff val="15000"/>
+                                </a:schemeClr>
+                              </a:solidFill>
+                              <a:latin typeface="Cambria Math" panose="02040503050406030204" pitchFamily="18" charset="0"/>
+                              <a:ea typeface="Cambria Math" panose="02040503050406030204" pitchFamily="18" charset="0"/>
+                            </a:rPr>
+                            <m:t>𝒂</m:t>
+                          </m:r>
+                        </m:e>
+                        <m:sub>
+                          <m:r>
+                            <a:rPr lang="es-ES" sz="2000" b="1" i="1" smtClean="0">
+                              <a:solidFill>
+                                <a:schemeClr val="tx1">
+                                  <a:lumMod val="85000"/>
+                                  <a:lumOff val="15000"/>
+                                </a:schemeClr>
+                              </a:solidFill>
+                              <a:latin typeface="Cambria Math" panose="02040503050406030204" pitchFamily="18" charset="0"/>
+                              <a:ea typeface="Cambria Math" panose="02040503050406030204" pitchFamily="18" charset="0"/>
+                            </a:rPr>
+                            <m:t>𝒄</m:t>
+                          </m:r>
+                          <m:r>
+                            <a:rPr lang="es-ES" sz="2000" b="1" i="1" smtClean="0">
+                              <a:solidFill>
+                                <a:schemeClr val="tx1">
+                                  <a:lumMod val="85000"/>
+                                  <a:lumOff val="15000"/>
+                                </a:schemeClr>
+                              </a:solidFill>
+                              <a:latin typeface="Cambria Math" panose="02040503050406030204" pitchFamily="18" charset="0"/>
+                              <a:ea typeface="Cambria Math" panose="02040503050406030204" pitchFamily="18" charset="0"/>
+                            </a:rPr>
+                            <m:t>,</m:t>
+                          </m:r>
+                          <m:r>
+                            <a:rPr lang="es-ES" sz="2000" b="1" i="1" smtClean="0">
+                              <a:solidFill>
+                                <a:schemeClr val="tx1">
+                                  <a:lumMod val="85000"/>
+                                  <a:lumOff val="15000"/>
+                                </a:schemeClr>
+                              </a:solidFill>
+                              <a:latin typeface="Cambria Math" panose="02040503050406030204" pitchFamily="18" charset="0"/>
+                              <a:ea typeface="Cambria Math" panose="02040503050406030204" pitchFamily="18" charset="0"/>
+                            </a:rPr>
+                            <m:t>𝒈</m:t>
+                          </m:r>
+                        </m:sub>
+                      </m:sSub>
                     </m:oMath>
                   </m:oMathPara>
                 </a14:m>
@@ -9114,7 +10574,7 @@
             </p:txBody>
           </p:sp>
         </mc:Choice>
-        <mc:Fallback xmlns="">
+        <mc:Fallback>
           <p:sp>
             <p:nvSpPr>
               <p:cNvPr id="7" name="Content Placeholder 2">
@@ -10663,7 +12123,7 @@
                   </a:schemeClr>
                 </a:solidFill>
               </a:rPr>
-              <a:t>Algunas ciudades con todos sus valores para el genérico 002 Arroz</a:t>
+              <a:t>Algunas ciudades con todos sus valores para el genérico “001 Arroz”.</a:t>
             </a:r>
           </a:p>
         </p:txBody>
@@ -10961,31 +12421,7 @@
                 </a:solidFill>
                 <a:latin typeface="Montserrat" panose="00000500000000000000" pitchFamily="50" charset="0"/>
               </a:rPr>
-              <a:t>Visualmente lo podemos ver al graficar las ciudades como puntos de coordenadas (Estabilidad, Variabilidad) colocar las rectas que corresponden a las medias de cada coordenada (azul para mean y roja para </a:t>
-            </a:r>
-            <a:r>
-              <a:rPr lang="es-ES" sz="2200" dirty="0" err="1">
-                <a:solidFill>
-                  <a:schemeClr val="tx1">
-                    <a:lumMod val="85000"/>
-                    <a:lumOff val="15000"/>
-                  </a:schemeClr>
-                </a:solidFill>
-                <a:latin typeface="Montserrat" panose="00000500000000000000" pitchFamily="50" charset="0"/>
-              </a:rPr>
-              <a:t>sd</a:t>
-            </a:r>
-            <a:r>
-              <a:rPr lang="es-ES" sz="2200" dirty="0">
-                <a:solidFill>
-                  <a:schemeClr val="tx1">
-                    <a:lumMod val="85000"/>
-                    <a:lumOff val="15000"/>
-                  </a:schemeClr>
-                </a:solidFill>
-                <a:latin typeface="Montserrat" panose="00000500000000000000" pitchFamily="50" charset="0"/>
-              </a:rPr>
-              <a:t>) y ver aquellas que caigan sobre el cuadrante de abajo a la izquierda.</a:t>
+              <a:t>Visualmente lo podemos ver al graficar las ciudades como puntos de coordenadas (Estabilidad, Variabilidad) colocar las rectas que corresponden a las medias de cada coordenada (azul para estabilidad y roja para variabilidad) y ver aquellas que caigan sobre el cuadrante inferior izquierdo.</a:t>
             </a:r>
             <a:endParaRPr lang="es-MX" sz="2200" dirty="0">
               <a:solidFill>
@@ -11258,7 +12694,7 @@
                   <a:srgbClr val="545454"/>
                 </a:solidFill>
               </a:rPr>
-              <a:t>Gráfica de los datos para el genérico 001 Arroz. </a:t>
+              <a:t>Gráfica de los datos para el genérico “001 Arroz”. </a:t>
             </a:r>
           </a:p>
           <a:p>
@@ -12443,10 +13879,47 @@
                   <a:buNone/>
                 </a:pPr>
                 <a:r>
-                  <a:rPr lang="es-MX" sz="2000" dirty="0">
-                    <a:latin typeface="Montserrat" panose="00000500000000000000" pitchFamily="50" charset="0"/>
-                  </a:rPr>
-                  <a:t>Consideraremos a aquellos cuyo valor del índice sea menor estricto que la media del mismo por genérico.</a:t>
+                  <a:rPr lang="es-MX" sz="2000" dirty="0"/>
+                  <a:t>Consideraremos para cada ciudad </a:t>
+                </a:r>
+                <a14:m>
+                  <m:oMath xmlns:m="http://schemas.openxmlformats.org/officeDocument/2006/math">
+                    <m:r>
+                      <a:rPr lang="es-MX" sz="2100" b="1" i="1" dirty="0" smtClean="0">
+                        <a:latin typeface="Cambria Math" panose="02040503050406030204" pitchFamily="18" charset="0"/>
+                      </a:rPr>
+                      <m:t>𝒄</m:t>
+                    </m:r>
+                    <m:r>
+                      <a:rPr lang="es-MX" sz="2400" b="1" i="1" dirty="0">
+                        <a:solidFill>
+                          <a:schemeClr val="tx1">
+                            <a:lumMod val="85000"/>
+                            <a:lumOff val="15000"/>
+                          </a:schemeClr>
+                        </a:solidFill>
+                      </a:rPr>
+                      <m:t> </m:t>
+                    </m:r>
+                  </m:oMath>
+                </a14:m>
+                <a:r>
+                  <a:rPr lang="es-MX" sz="2000" dirty="0"/>
+                  <a:t>y genérico </a:t>
+                </a:r>
+                <a14:m>
+                  <m:oMath xmlns:m="http://schemas.openxmlformats.org/officeDocument/2006/math">
+                    <m:r>
+                      <a:rPr lang="es-MX" sz="2100" b="1" i="1" dirty="0" smtClean="0">
+                        <a:latin typeface="Cambria Math" panose="02040503050406030204" pitchFamily="18" charset="0"/>
+                      </a:rPr>
+                      <m:t>𝒈</m:t>
+                    </m:r>
+                  </m:oMath>
+                </a14:m>
+                <a:r>
+                  <a:rPr lang="es-MX" sz="2000" dirty="0"/>
+                  <a:t> si su valor de índice es menor estricto que la media del mismo índice por genérico.</a:t>
                 </a:r>
               </a:p>
               <a:p>
